--- a/present/ripwire-showcase.pptx
+++ b/present/ripwire-showcase.pptx
@@ -24405,7 +24405,7 @@
                 <a:ea typeface="Arial" pitchFamily="34" charset="-122"/>
                 <a:cs typeface="Arial" pitchFamily="34" charset="-120"/>
               </a:rPr>
-              <a:t>648 gate scripts</a:t>
+              <a:t>649 gate scripts</a:t>
             </a:r>
             <a:endParaRPr lang="en-US" sz="1450" dirty="0"/>
           </a:p>
@@ -25145,7 +25145,7 @@
                 <a:ea typeface="Arial" pitchFamily="34" charset="-122"/>
                 <a:cs typeface="Arial" pitchFamily="34" charset="-120"/>
               </a:rPr>
-              <a:t>648</a:t>
+              <a:t>649</a:t>
             </a:r>
             <a:endParaRPr lang="en-US" sz="4200" dirty="0"/>
           </a:p>
@@ -32870,7 +32870,7 @@
                 <a:ea typeface="Arial" pitchFamily="34" charset="-122"/>
                 <a:cs typeface="Arial" pitchFamily="34" charset="-120"/>
               </a:rPr>
-              <a:t>648 gate scripts</a:t>
+              <a:t>649 gate scripts</a:t>
             </a:r>
             <a:endParaRPr lang="en-US" sz="1200" dirty="0"/>
           </a:p>
